--- a/bw-law/BW Law, PLLC_August 14, 2026_Proposal.pptx
+++ b/bw-law/BW Law, PLLC_August 14, 2026_Proposal.pptx
@@ -5143,7 +5143,7 @@
                 </a:solidFill>
                 <a:latin typeface="Poppins"/>
               </a:rPr>
-              <a:t>4.9 stars · 6x volume</a:t>
+              <a:t>4.9 stars · 4x volume</a:t>
             </a:r>
           </a:p>
         </p:txBody>
@@ -5587,7 +5587,7 @@
                 </a:solidFill>
                 <a:latin typeface="Poppins"/>
               </a:rPr>
-              <a:t>21 reviews</a:t>
+              <a:t>30 reviews</a:t>
             </a:r>
           </a:p>
         </p:txBody>
@@ -6910,7 +6910,7 @@
                 </a:solidFill>
                 <a:latin typeface="Poppins"/>
               </a:rPr>
-              <a:t>Test a modest paid visibility channel</a:t>
+              <a:t>Monitor local search visibility as directory fixes take effect</a:t>
             </a:r>
           </a:p>
         </p:txBody>
@@ -8428,7 +8428,7 @@
                 </a:solidFill>
                 <a:latin typeface="Poppins"/>
               </a:rPr>
-              <a:t>Revisit AI Workforce once revenue nears $500K</a:t>
+              <a:t>Add the AI Workforce Starter seat for admin automation</a:t>
             </a:r>
           </a:p>
         </p:txBody>
@@ -8815,7 +8815,7 @@
                 </a:solidFill>
                 <a:latin typeface="Poppins"/>
               </a:rPr>
-              <a:t>ELITE COACH</a:t>
+              <a:t>COACH ESSENTIALS PLUS</a:t>
             </a:r>
           </a:p>
         </p:txBody>
@@ -8848,7 +8848,7 @@
                 </a:solidFill>
                 <a:latin typeface="Poppins"/>
               </a:rPr>
-              <a:t>$2,600</a:t>
+              <a:t>$2,497</a:t>
             </a:r>
           </a:p>
         </p:txBody>
@@ -8894,8 +8894,8 @@
         </p:nvSpPr>
         <p:spPr>
           <a:xfrm>
-            <a:off x="2322576" y="1426464"/>
-            <a:ext cx="914400" cy="237744"/>
+            <a:off x="475488" y="1792224"/>
+            <a:ext cx="3803904" cy="201168"/>
           </a:xfrm>
           <a:prstGeom prst="rect">
             <a:avLst/>
@@ -8908,13 +8908,13 @@
           <a:p>
             <a:pPr algn="l"/>
             <a:r>
-              <a:rPr sz="1100" b="0" i="0">
-                <a:solidFill>
-                  <a:srgbClr val="334155"/>
+              <a:rPr sz="800" b="0" i="0">
+                <a:solidFill>
+                  <a:srgbClr val="64748B"/>
                 </a:solidFill>
                 <a:latin typeface="Poppins"/>
               </a:rPr>
-              <a:t>$3,497/mo</a:t>
+              <a:t>Weekly group coaching · Monthly 1:1 · Hiring/delegation framework</a:t>
             </a:r>
           </a:p>
         </p:txBody>
@@ -8927,14 +8927,14 @@
         </p:nvSpPr>
         <p:spPr>
           <a:xfrm>
-            <a:off x="2322576" y="1527048"/>
-            <a:ext cx="804672" cy="9144"/>
+            <a:off x="201168" y="2139696"/>
+            <a:ext cx="4133087" cy="1024128"/>
           </a:xfrm>
           <a:prstGeom prst="rect">
             <a:avLst/>
           </a:prstGeom>
           <a:solidFill>
-            <a:srgbClr val="334155"/>
+            <a:srgbClr val="FFFFFF"/>
           </a:solidFill>
           <a:ln>
             <a:solidFill>
@@ -8966,13 +8966,58 @@
       </p:sp>
       <p:sp>
         <p:nvSpPr>
-          <p:cNvPr id="12" name="TextBox 11"/>
+          <p:cNvPr id="12" name="Rectangle 11"/>
+          <p:cNvSpPr/>
+          <p:nvPr/>
+        </p:nvSpPr>
+        <p:spPr>
+          <a:xfrm>
+            <a:off x="201168" y="2139696"/>
+            <a:ext cx="182880" cy="1024128"/>
+          </a:xfrm>
+          <a:prstGeom prst="rect">
+            <a:avLst/>
+          </a:prstGeom>
+          <a:solidFill>
+            <a:srgbClr val="0091C9"/>
+          </a:solidFill>
+          <a:ln>
+            <a:solidFill>
+              <a:srgbClr val="FFFFFF"/>
+            </a:solidFill>
+          </a:ln>
+        </p:spPr>
+        <p:style>
+          <a:lnRef idx="1">
+            <a:schemeClr val="accent1"/>
+          </a:lnRef>
+          <a:fillRef idx="3">
+            <a:schemeClr val="accent1"/>
+          </a:fillRef>
+          <a:effectRef idx="2">
+            <a:schemeClr val="accent1"/>
+          </a:effectRef>
+          <a:fontRef idx="minor">
+            <a:schemeClr val="lt1"/>
+          </a:fontRef>
+        </p:style>
+        <p:txBody>
+          <a:bodyPr rtlCol="0" anchor="ctr"/>
+          <a:lstStyle/>
+          <a:p>
+            <a:pPr algn="ctr"/>
+          </a:p>
+        </p:txBody>
+      </p:sp>
+      <p:sp>
+        <p:nvSpPr>
+          <p:cNvPr id="13" name="TextBox 12"/>
           <p:cNvSpPr txBox="1"/>
           <p:nvPr/>
         </p:nvSpPr>
         <p:spPr>
           <a:xfrm>
-            <a:off x="475488" y="1792224"/>
+            <a:off x="475488" y="2231136"/>
             <a:ext cx="3803904" cy="201168"/>
           </a:xfrm>
           <a:prstGeom prst="rect">
@@ -8986,20 +9031,119 @@
           <a:p>
             <a:pPr algn="l"/>
             <a:r>
-              <a:rPr sz="800" b="0" i="0">
-                <a:solidFill>
-                  <a:srgbClr val="64748B"/>
+              <a:rPr sz="800" b="1" i="0">
+                <a:solidFill>
+                  <a:srgbClr val="0091C9"/>
                 </a:solidFill>
                 <a:latin typeface="Poppins"/>
               </a:rPr>
-              <a:t>Weekly group coaching · Masterminds · Hiring/delegation framework</a:t>
-            </a:r>
-          </a:p>
-        </p:txBody>
-      </p:sp>
-      <p:sp>
-        <p:nvSpPr>
-          <p:cNvPr id="13" name="Rectangle 12"/>
+              <a:t>AI WORKFORCE PRO — STARTER (1 USER)</a:t>
+            </a:r>
+          </a:p>
+        </p:txBody>
+      </p:sp>
+      <p:sp>
+        <p:nvSpPr>
+          <p:cNvPr id="14" name="TextBox 13"/>
+          <p:cNvSpPr txBox="1"/>
+          <p:nvPr/>
+        </p:nvSpPr>
+        <p:spPr>
+          <a:xfrm>
+            <a:off x="475488" y="2414015"/>
+            <a:ext cx="1828800" cy="438912"/>
+          </a:xfrm>
+          <a:prstGeom prst="rect">
+            <a:avLst/>
+          </a:prstGeom>
+          <a:noFill/>
+        </p:spPr>
+        <p:txBody>
+          <a:bodyPr wrap="square"/>
+          <a:lstStyle/>
+          <a:p>
+            <a:pPr algn="l"/>
+            <a:r>
+              <a:rPr sz="3200" b="1" i="0">
+                <a:solidFill>
+                  <a:srgbClr val="003A59"/>
+                </a:solidFill>
+                <a:latin typeface="Poppins"/>
+              </a:rPr>
+              <a:t>$350</a:t>
+            </a:r>
+          </a:p>
+        </p:txBody>
+      </p:sp>
+      <p:sp>
+        <p:nvSpPr>
+          <p:cNvPr id="15" name="TextBox 14"/>
+          <p:cNvSpPr txBox="1"/>
+          <p:nvPr/>
+        </p:nvSpPr>
+        <p:spPr>
+          <a:xfrm>
+            <a:off x="1865376" y="2523744"/>
+            <a:ext cx="420624" cy="256032"/>
+          </a:xfrm>
+          <a:prstGeom prst="rect">
+            <a:avLst/>
+          </a:prstGeom>
+          <a:noFill/>
+        </p:spPr>
+        <p:txBody>
+          <a:bodyPr wrap="square"/>
+          <a:lstStyle/>
+          <a:p>
+            <a:pPr algn="l"/>
+            <a:r>
+              <a:rPr sz="1100" b="0" i="0">
+                <a:solidFill>
+                  <a:srgbClr val="64748B"/>
+                </a:solidFill>
+                <a:latin typeface="Poppins"/>
+              </a:rPr>
+              <a:t>/mo</a:t>
+            </a:r>
+          </a:p>
+        </p:txBody>
+      </p:sp>
+      <p:sp>
+        <p:nvSpPr>
+          <p:cNvPr id="16" name="TextBox 15"/>
+          <p:cNvSpPr txBox="1"/>
+          <p:nvPr/>
+        </p:nvSpPr>
+        <p:spPr>
+          <a:xfrm>
+            <a:off x="475488" y="2907791"/>
+            <a:ext cx="3803904" cy="201168"/>
+          </a:xfrm>
+          <a:prstGeom prst="rect">
+            <a:avLst/>
+          </a:prstGeom>
+          <a:noFill/>
+        </p:spPr>
+        <p:txBody>
+          <a:bodyPr wrap="square"/>
+          <a:lstStyle/>
+          <a:p>
+            <a:pPr algn="l"/>
+            <a:r>
+              <a:rPr sz="800" b="0" i="0">
+                <a:solidFill>
+                  <a:srgbClr val="64748B"/>
+                </a:solidFill>
+                <a:latin typeface="Poppins"/>
+              </a:rPr>
+              <a:t>Intake qualification · Case updates · Email drafting</a:t>
+            </a:r>
+          </a:p>
+        </p:txBody>
+      </p:sp>
+      <p:sp>
+        <p:nvSpPr>
+          <p:cNvPr id="17" name="Rectangle 16"/>
           <p:cNvSpPr/>
           <p:nvPr/>
         </p:nvSpPr>
@@ -9044,7 +9188,7 @@
       </p:sp>
       <p:sp>
         <p:nvSpPr>
-          <p:cNvPr id="14" name="TextBox 13"/>
+          <p:cNvPr id="18" name="TextBox 17"/>
           <p:cNvSpPr txBox="1"/>
           <p:nvPr/>
         </p:nvSpPr>
@@ -9077,7 +9221,7 @@
       </p:sp>
       <p:sp>
         <p:nvSpPr>
-          <p:cNvPr id="15" name="TextBox 14"/>
+          <p:cNvPr id="19" name="TextBox 18"/>
           <p:cNvSpPr txBox="1"/>
           <p:nvPr/>
         </p:nvSpPr>
@@ -9103,14 +9247,14 @@
                 </a:solidFill>
                 <a:latin typeface="Poppins"/>
               </a:rPr>
-              <a:t>$2,600 / mo</a:t>
-            </a:r>
-          </a:p>
-        </p:txBody>
-      </p:sp>
-      <p:sp>
-        <p:nvSpPr>
-          <p:cNvPr id="16" name="TextBox 15"/>
+              <a:t>$2,847 / mo</a:t>
+            </a:r>
+          </a:p>
+        </p:txBody>
+      </p:sp>
+      <p:sp>
+        <p:nvSpPr>
+          <p:cNvPr id="20" name="TextBox 19"/>
           <p:cNvSpPr txBox="1"/>
           <p:nvPr/>
         </p:nvSpPr>
@@ -9136,14 +9280,14 @@
                 </a:solidFill>
                 <a:latin typeface="Poppins"/>
               </a:rPr>
-              <a:t>Save $897/mo by bundling</a:t>
-            </a:r>
-          </a:p>
-        </p:txBody>
-      </p:sp>
-      <p:sp>
-        <p:nvSpPr>
-          <p:cNvPr id="17" name="Rectangle 16"/>
+              <a:t>Stand-alone pricing — no marketing bundle</a:t>
+            </a:r>
+          </a:p>
+        </p:txBody>
+      </p:sp>
+      <p:sp>
+        <p:nvSpPr>
+          <p:cNvPr id="21" name="Rectangle 20"/>
           <p:cNvSpPr/>
           <p:nvPr/>
         </p:nvSpPr>
@@ -9188,7 +9332,7 @@
       </p:sp>
       <p:sp>
         <p:nvSpPr>
-          <p:cNvPr id="18" name="TextBox 17"/>
+          <p:cNvPr id="22" name="TextBox 21"/>
           <p:cNvSpPr txBox="1"/>
           <p:nvPr/>
         </p:nvSpPr>
@@ -9214,14 +9358,14 @@
                 </a:solidFill>
                 <a:latin typeface="Poppins"/>
               </a:rPr>
-              <a:t>Optional: test paid visibility at $3,000–$8,300/mo, paid directly to Google/LSA</a:t>
-            </a:r>
-          </a:p>
-        </p:txBody>
-      </p:sp>
-      <p:sp>
-        <p:nvSpPr>
-          <p:cNvPr id="19" name="Rectangle 18"/>
+              <a:t>Not recommended yet — budget priority is hiring/ops first. LSA/PPC comped by Randy whenever she opts in.</a:t>
+            </a:r>
+          </a:p>
+        </p:txBody>
+      </p:sp>
+      <p:sp>
+        <p:nvSpPr>
+          <p:cNvPr id="23" name="Rectangle 22"/>
           <p:cNvSpPr/>
           <p:nvPr/>
         </p:nvSpPr>
@@ -9234,7 +9378,7 @@
             <a:avLst/>
           </a:prstGeom>
           <a:solidFill>
-            <a:srgbClr val="ECFDF5"/>
+            <a:srgbClr val="F0F4FA"/>
           </a:solidFill>
           <a:ln>
             <a:solidFill>
@@ -9266,7 +9410,7 @@
       </p:sp>
       <p:sp>
         <p:nvSpPr>
-          <p:cNvPr id="20" name="TextBox 19"/>
+          <p:cNvPr id="24" name="TextBox 23"/>
           <p:cNvSpPr txBox="1"/>
           <p:nvPr/>
         </p:nvSpPr>
@@ -9288,18 +9432,18 @@
             <a:r>
               <a:rPr sz="800" b="1" i="0">
                 <a:solidFill>
-                  <a:srgbClr val="065F46"/>
+                  <a:srgbClr val="64748B"/>
                 </a:solidFill>
                 <a:latin typeface="Poppins"/>
               </a:rPr>
-              <a:t>PROJECTED RETURN ON AD SPEND</a:t>
-            </a:r>
-          </a:p>
-        </p:txBody>
-      </p:sp>
-      <p:sp>
-        <p:nvSpPr>
-          <p:cNvPr id="21" name="TextBox 20"/>
+              <a:t>PAID ADS — REFERENCE ONLY, NOT RECOMMENDED YET</a:t>
+            </a:r>
+          </a:p>
+        </p:txBody>
+      </p:sp>
+      <p:sp>
+        <p:nvSpPr>
+          <p:cNvPr id="25" name="TextBox 24"/>
           <p:cNvSpPr txBox="1"/>
           <p:nvPr/>
         </p:nvSpPr>
@@ -9332,7 +9476,7 @@
       </p:sp>
       <p:sp>
         <p:nvSpPr>
-          <p:cNvPr id="22" name="TextBox 21"/>
+          <p:cNvPr id="26" name="TextBox 25"/>
           <p:cNvSpPr txBox="1"/>
           <p:nvPr/>
         </p:nvSpPr>
@@ -9354,7 +9498,7 @@
             <a:r>
               <a:rPr sz="900" b="0" i="0">
                 <a:solidFill>
-                  <a:srgbClr val="065F46"/>
+                  <a:srgbClr val="64748B"/>
                 </a:solidFill>
                 <a:latin typeface="Poppins"/>
               </a:rPr>
@@ -9365,7 +9509,7 @@
       </p:sp>
       <p:sp>
         <p:nvSpPr>
-          <p:cNvPr id="23" name="Rectangle 22"/>
+          <p:cNvPr id="27" name="Rectangle 26"/>
           <p:cNvSpPr/>
           <p:nvPr/>
         </p:nvSpPr>
@@ -9378,7 +9522,7 @@
             <a:avLst/>
           </a:prstGeom>
           <a:solidFill>
-            <a:srgbClr val="D1FAE5"/>
+            <a:srgbClr val="F0F4FA"/>
           </a:solidFill>
           <a:ln>
             <a:solidFill>
@@ -9410,7 +9554,7 @@
       </p:sp>
       <p:sp>
         <p:nvSpPr>
-          <p:cNvPr id="24" name="TextBox 23"/>
+          <p:cNvPr id="28" name="TextBox 27"/>
           <p:cNvSpPr txBox="1"/>
           <p:nvPr/>
         </p:nvSpPr>
@@ -9436,14 +9580,14 @@
                 </a:solidFill>
                 <a:latin typeface="Poppins"/>
               </a:rPr>
-              <a:t>Conservative  (~4 cases/mo):</a:t>
-            </a:r>
-          </a:p>
-        </p:txBody>
-      </p:sp>
-      <p:sp>
-        <p:nvSpPr>
-          <p:cNvPr id="25" name="TextBox 24"/>
+              <a:t>If pursued later (~4 cases/mo):</a:t>
+            </a:r>
+          </a:p>
+        </p:txBody>
+      </p:sp>
+      <p:sp>
+        <p:nvSpPr>
+          <p:cNvPr id="29" name="TextBox 28"/>
           <p:cNvSpPr txBox="1"/>
           <p:nvPr/>
         </p:nvSpPr>
@@ -9465,7 +9609,7 @@
             <a:r>
               <a:rPr sz="900" b="1" i="0">
                 <a:solidFill>
-                  <a:srgbClr val="065F46"/>
+                  <a:srgbClr val="64748B"/>
                 </a:solidFill>
                 <a:latin typeface="Poppins"/>
               </a:rPr>
@@ -9476,7 +9620,7 @@
       </p:sp>
       <p:sp>
         <p:nvSpPr>
-          <p:cNvPr id="26" name="TextBox 25"/>
+          <p:cNvPr id="30" name="TextBox 29"/>
           <p:cNvSpPr txBox="1"/>
           <p:nvPr/>
         </p:nvSpPr>
@@ -9502,14 +9646,14 @@
                 </a:solidFill>
                 <a:latin typeface="Poppins"/>
               </a:rPr>
-              <a:t>Aggressive  (~13 cases/mo):</a:t>
-            </a:r>
-          </a:p>
-        </p:txBody>
-      </p:sp>
-      <p:sp>
-        <p:nvSpPr>
-          <p:cNvPr id="27" name="TextBox 26"/>
+              <a:t>If pursued later (~13 cases/mo):</a:t>
+            </a:r>
+          </a:p>
+        </p:txBody>
+      </p:sp>
+      <p:sp>
+        <p:nvSpPr>
+          <p:cNvPr id="31" name="TextBox 30"/>
           <p:cNvSpPr txBox="1"/>
           <p:nvPr/>
         </p:nvSpPr>
@@ -9531,7 +9675,7 @@
             <a:r>
               <a:rPr sz="900" b="1" i="0">
                 <a:solidFill>
-                  <a:srgbClr val="065F46"/>
+                  <a:srgbClr val="64748B"/>
                 </a:solidFill>
                 <a:latin typeface="Poppins"/>
               </a:rPr>
@@ -9542,7 +9686,7 @@
       </p:sp>
       <p:sp>
         <p:nvSpPr>
-          <p:cNvPr id="28" name="TextBox 27"/>
+          <p:cNvPr id="32" name="TextBox 31"/>
           <p:cNvSpPr txBox="1"/>
           <p:nvPr/>
         </p:nvSpPr>
@@ -9575,7 +9719,7 @@
       </p:sp>
       <p:sp>
         <p:nvSpPr>
-          <p:cNvPr id="29" name="Rectangle 28"/>
+          <p:cNvPr id="33" name="Rectangle 32"/>
           <p:cNvSpPr/>
           <p:nvPr/>
         </p:nvSpPr>
@@ -9620,7 +9764,7 @@
       </p:sp>
       <p:sp>
         <p:nvSpPr>
-          <p:cNvPr id="30" name="TextBox 29"/>
+          <p:cNvPr id="34" name="TextBox 33"/>
           <p:cNvSpPr txBox="1"/>
           <p:nvPr/>
         </p:nvSpPr>
@@ -9653,7 +9797,7 @@
       </p:sp>
       <p:sp>
         <p:nvSpPr>
-          <p:cNvPr id="31" name="TextBox 30"/>
+          <p:cNvPr id="35" name="TextBox 34"/>
           <p:cNvSpPr txBox="1"/>
           <p:nvPr/>
         </p:nvSpPr>
@@ -9679,14 +9823,14 @@
                 </a:solidFill>
                 <a:latin typeface="Poppins"/>
               </a:rPr>
-              <a:t>Kick off Elite Coach — build the hiring roadmap</a:t>
-            </a:r>
-          </a:p>
-        </p:txBody>
-      </p:sp>
-      <p:sp>
-        <p:nvSpPr>
-          <p:cNvPr id="32" name="Rectangle 31"/>
+              <a:t>Kick off Coach Essentials Plus — build the hiring roadmap</a:t>
+            </a:r>
+          </a:p>
+        </p:txBody>
+      </p:sp>
+      <p:sp>
+        <p:nvSpPr>
+          <p:cNvPr id="36" name="Rectangle 35"/>
           <p:cNvSpPr/>
           <p:nvPr/>
         </p:nvSpPr>
@@ -9731,7 +9875,7 @@
       </p:sp>
       <p:sp>
         <p:nvSpPr>
-          <p:cNvPr id="33" name="TextBox 32"/>
+          <p:cNvPr id="37" name="TextBox 36"/>
           <p:cNvSpPr txBox="1"/>
           <p:nvPr/>
         </p:nvSpPr>
@@ -9757,14 +9901,14 @@
                 </a:solidFill>
                 <a:latin typeface="Poppins"/>
               </a:rPr>
-              <a:t>Day 14</a:t>
-            </a:r>
-          </a:p>
-        </p:txBody>
-      </p:sp>
-      <p:sp>
-        <p:nvSpPr>
-          <p:cNvPr id="34" name="TextBox 33"/>
+              <a:t>Day 1</a:t>
+            </a:r>
+          </a:p>
+        </p:txBody>
+      </p:sp>
+      <p:sp>
+        <p:nvSpPr>
+          <p:cNvPr id="38" name="TextBox 37"/>
           <p:cNvSpPr txBox="1"/>
           <p:nvPr/>
         </p:nvSpPr>
@@ -9790,14 +9934,14 @@
                 </a:solidFill>
                 <a:latin typeface="Poppins"/>
               </a:rPr>
-              <a:t>Fix footer bug and add homepage contact form</a:t>
-            </a:r>
-          </a:p>
-        </p:txBody>
-      </p:sp>
-      <p:sp>
-        <p:nvSpPr>
-          <p:cNvPr id="35" name="Rectangle 34"/>
+              <a:t>AI Workforce Starter seat live for intake and admin</a:t>
+            </a:r>
+          </a:p>
+        </p:txBody>
+      </p:sp>
+      <p:sp>
+        <p:nvSpPr>
+          <p:cNvPr id="39" name="Rectangle 38"/>
           <p:cNvSpPr/>
           <p:nvPr/>
         </p:nvSpPr>
@@ -9842,7 +9986,7 @@
       </p:sp>
       <p:sp>
         <p:nvSpPr>
-          <p:cNvPr id="36" name="TextBox 35"/>
+          <p:cNvPr id="40" name="TextBox 39"/>
           <p:cNvSpPr txBox="1"/>
           <p:nvPr/>
         </p:nvSpPr>
@@ -9868,14 +10012,14 @@
                 </a:solidFill>
                 <a:latin typeface="Poppins"/>
               </a:rPr>
-              <a:t>Week 2</a:t>
-            </a:r>
-          </a:p>
-        </p:txBody>
-      </p:sp>
-      <p:sp>
-        <p:nvSpPr>
-          <p:cNvPr id="37" name="TextBox 36"/>
+              <a:t>Day 14</a:t>
+            </a:r>
+          </a:p>
+        </p:txBody>
+      </p:sp>
+      <p:sp>
+        <p:nvSpPr>
+          <p:cNvPr id="41" name="TextBox 40"/>
           <p:cNvSpPr txBox="1"/>
           <p:nvPr/>
         </p:nvSpPr>
@@ -9901,14 +10045,14 @@
                 </a:solidFill>
                 <a:latin typeface="Poppins"/>
               </a:rPr>
-              <a:t>Resolve NAP address mismatch across directories</a:t>
-            </a:r>
-          </a:p>
-        </p:txBody>
-      </p:sp>
-      <p:sp>
-        <p:nvSpPr>
-          <p:cNvPr id="38" name="Rectangle 37"/>
+              <a:t>Fix footer bug and add homepage contact form</a:t>
+            </a:r>
+          </a:p>
+        </p:txBody>
+      </p:sp>
+      <p:sp>
+        <p:nvSpPr>
+          <p:cNvPr id="42" name="Rectangle 41"/>
           <p:cNvSpPr/>
           <p:nvPr/>
         </p:nvSpPr>
@@ -9953,7 +10097,7 @@
       </p:sp>
       <p:sp>
         <p:nvSpPr>
-          <p:cNvPr id="39" name="TextBox 38"/>
+          <p:cNvPr id="43" name="TextBox 42"/>
           <p:cNvSpPr txBox="1"/>
           <p:nvPr/>
         </p:nvSpPr>
@@ -9979,14 +10123,14 @@
                 </a:solidFill>
                 <a:latin typeface="Poppins"/>
               </a:rPr>
-              <a:t>Week 3</a:t>
-            </a:r>
-          </a:p>
-        </p:txBody>
-      </p:sp>
-      <p:sp>
-        <p:nvSpPr>
-          <p:cNvPr id="40" name="TextBox 39"/>
+              <a:t>Week 2</a:t>
+            </a:r>
+          </a:p>
+        </p:txBody>
+      </p:sp>
+      <p:sp>
+        <p:nvSpPr>
+          <p:cNvPr id="44" name="TextBox 43"/>
           <p:cNvSpPr txBox="1"/>
           <p:nvPr/>
         </p:nvSpPr>
@@ -10012,14 +10156,14 @@
                 </a:solidFill>
                 <a:latin typeface="Poppins"/>
               </a:rPr>
-              <a:t>Confirm PageSpeed and fill Yelp/FindLaw/Justia gaps</a:t>
-            </a:r>
-          </a:p>
-        </p:txBody>
-      </p:sp>
-      <p:sp>
-        <p:nvSpPr>
-          <p:cNvPr id="41" name="Rectangle 40"/>
+              <a:t>Resolve NAP address mismatch across directories</a:t>
+            </a:r>
+          </a:p>
+        </p:txBody>
+      </p:sp>
+      <p:sp>
+        <p:nvSpPr>
+          <p:cNvPr id="45" name="Rectangle 44"/>
           <p:cNvSpPr/>
           <p:nvPr/>
         </p:nvSpPr>
@@ -10064,7 +10208,7 @@
       </p:sp>
       <p:sp>
         <p:nvSpPr>
-          <p:cNvPr id="42" name="TextBox 41"/>
+          <p:cNvPr id="46" name="TextBox 45"/>
           <p:cNvSpPr txBox="1"/>
           <p:nvPr/>
         </p:nvSpPr>
@@ -10090,14 +10234,14 @@
                 </a:solidFill>
                 <a:latin typeface="Poppins"/>
               </a:rPr>
-              <a:t>Month 3</a:t>
-            </a:r>
-          </a:p>
-        </p:txBody>
-      </p:sp>
-      <p:sp>
-        <p:nvSpPr>
-          <p:cNvPr id="43" name="TextBox 42"/>
+              <a:t>Week 3</a:t>
+            </a:r>
+          </a:p>
+        </p:txBody>
+      </p:sp>
+      <p:sp>
+        <p:nvSpPr>
+          <p:cNvPr id="47" name="TextBox 46"/>
           <p:cNvSpPr txBox="1"/>
           <p:nvPr/>
         </p:nvSpPr>
@@ -10123,14 +10267,14 @@
                 </a:solidFill>
                 <a:latin typeface="Poppins"/>
               </a:rPr>
-              <a:t>Optional paid visibility test alongside coaching</a:t>
-            </a:r>
-          </a:p>
-        </p:txBody>
-      </p:sp>
-      <p:sp>
-        <p:nvSpPr>
-          <p:cNvPr id="44" name="Rectangle 43"/>
+              <a:t>Confirm PageSpeed and fill Yelp/FindLaw/Justia gaps</a:t>
+            </a:r>
+          </a:p>
+        </p:txBody>
+      </p:sp>
+      <p:sp>
+        <p:nvSpPr>
+          <p:cNvPr id="48" name="Rectangle 47"/>
           <p:cNvSpPr/>
           <p:nvPr/>
         </p:nvSpPr>
@@ -10175,7 +10319,7 @@
       </p:sp>
       <p:sp>
         <p:nvSpPr>
-          <p:cNvPr id="45" name="TextBox 44"/>
+          <p:cNvPr id="49" name="TextBox 48"/>
           <p:cNvSpPr txBox="1"/>
           <p:nvPr/>
         </p:nvSpPr>
@@ -10208,7 +10352,7 @@
       </p:sp>
       <p:sp>
         <p:nvSpPr>
-          <p:cNvPr id="46" name="Rectangle 45"/>
+          <p:cNvPr id="50" name="Rectangle 49"/>
           <p:cNvSpPr/>
           <p:nvPr/>
         </p:nvSpPr>
@@ -10253,7 +10397,7 @@
       </p:sp>
       <p:pic>
         <p:nvPicPr>
-          <p:cNvPr id="47" name="Picture 46" descr="smb_team_logo.png"/>
+          <p:cNvPr id="51" name="Picture 50" descr="smb_team_logo.png"/>
           <p:cNvPicPr>
             <a:picLocks noChangeAspect="1"/>
           </p:cNvPicPr>
@@ -10277,7 +10421,7 @@
       </p:pic>
       <p:sp>
         <p:nvSpPr>
-          <p:cNvPr id="48" name="TextBox 47"/>
+          <p:cNvPr id="52" name="TextBox 51"/>
           <p:cNvSpPr txBox="1"/>
           <p:nvPr/>
         </p:nvSpPr>
@@ -10310,7 +10454,7 @@
       </p:sp>
       <p:sp>
         <p:nvSpPr>
-          <p:cNvPr id="49" name="TextBox 48"/>
+          <p:cNvPr id="53" name="TextBox 52"/>
           <p:cNvSpPr txBox="1"/>
           <p:nvPr/>
         </p:nvSpPr>
